--- a/slides/decks/s09-chronic-gvhd-ecp.pptx
+++ b/slides/decks/s09-chronic-gvhd-ecp.pptx
@@ -133,13 +133,13 @@
   <p:extLst>
     <p:ext uri="{521415D9-36F7-43E2-AB2F-B90AF26B5E84}">
       <p14:sectionLst xmlns:p14="http://schemas.microsoft.com/office/powerpoint/2010/main">
-        <p14:section name="Opening" id="{4b1ea903-eee5-e8ae-21a4-6bed7a47d977}">
+        <p14:section name="Opening" id="{b1451f87-f600-5a8b-6d10-1d0584b55e32}">
           <p14:sldIdLst>
             <p14:sldId id="256"/>
             <p14:sldId id="257"/>
           </p14:sldIdLst>
         </p14:section>
-        <p14:section name="Burden and diagnosis" id="{d1c3d287-68d4-80de-ab41-591adee0e72e}">
+        <p14:section name="Burden and diagnosis" id="{297e46ba-1536-308b-51e2-37298e77541f}">
           <p14:sldIdLst>
             <p14:sldId id="258"/>
             <p14:sldId id="259"/>
@@ -148,7 +148,7 @@
             <p14:sldId id="262"/>
           </p14:sldIdLst>
         </p14:section>
-        <p14:section name="First-line therapy" id="{c95f0d56-e970-be4b-2ffd-76db7818d841}">
+        <p14:section name="First-line therapy" id="{35ca47e7-7a00-9cfd-45f8-51d2f37b2195}">
           <p14:sldIdLst>
             <p14:sldId id="263"/>
             <p14:sldId id="264"/>
@@ -156,7 +156,7 @@
             <p14:sldId id="266"/>
           </p14:sldIdLst>
         </p14:section>
-        <p14:section name="Second line and ECP" id="{62b0d365-f1d7-fb49-a9f0-f02e2aa3918d}">
+        <p14:section name="Second line and ECP" id="{221a2915-8115-1fa6-afdf-d46d5f2b576e}">
           <p14:sldIdLst>
             <p14:sldId id="267"/>
             <p14:sldId id="268"/>
@@ -165,7 +165,7 @@
             <p14:sldId id="271"/>
           </p14:sldIdLst>
         </p14:section>
-        <p14:section name="Board questions" id="{bbe778f0-4ea9-a65f-29fd-7903a0a9cc73}">
+        <p14:section name="Board questions" id="{3500cd52-5b53-e373-32a7-35cdde1a3eb6}">
           <p14:sldIdLst>
             <p14:sldId id="272"/>
             <p14:sldId id="273"/>
@@ -175,13 +175,13 @@
             <p14:sldId id="277"/>
           </p14:sldIdLst>
         </p14:section>
-        <p14:section name="References" id="{672d87c0-d1f3-6530-6d2b-835cb90abe73}">
+        <p14:section name="References" id="{1289edaa-aa8f-99fc-b705-84a5987dfc3f}">
           <p14:sldIdLst>
             <p14:sldId id="278"/>
             <p14:sldId id="279"/>
           </p14:sldIdLst>
         </p14:section>
-        <p14:section name="Backup" id="{1e87c07b-960f-2b0d-1b7d-fff10863cb49}">
+        <p14:section name="Backup" id="{fb8313ec-0d86-38a8-e73e-02592e0a5543}">
           <p14:sldIdLst>
             <p14:sldId id="280"/>
             <p14:sldId id="281"/>
